--- a/CP1_A7.pptx
+++ b/CP1_A7.pptx
@@ -1139,7 +1139,7 @@
           <a:noFill/>
         </p:spPr>
         <p:txBody>
-          <a:bodyPr wrap="square" lIns="0" rIns="0" tIns="0" bIns="0" anchor="t">
+          <a:bodyPr wrap="square" lIns="0" tIns="0" rIns="0" bIns="0" anchor="t">
             <a:spAutoFit/>
           </a:bodyPr>
           <a:lstStyle/>
@@ -1204,6 +1204,7 @@
           <a:lstStyle/>
           <a:p>
             <a:pPr algn="ctr"/>
+            <a:endParaRPr/>
           </a:p>
         </p:txBody>
       </p:sp>
@@ -1224,7 +1225,7 @@
           <a:noFill/>
         </p:spPr>
         <p:txBody>
-          <a:bodyPr wrap="square" lIns="0" rIns="0" tIns="0" bIns="0" anchor="t">
+          <a:bodyPr wrap="square" lIns="0" tIns="0" rIns="0" bIns="0" anchor="t">
             <a:spAutoFit/>
           </a:bodyPr>
           <a:lstStyle/>
@@ -1330,6 +1331,7 @@
           <a:lstStyle/>
           <a:p>
             <a:pPr algn="ctr"/>
+            <a:endParaRPr/>
           </a:p>
         </p:txBody>
       </p:sp>
@@ -1350,7 +1352,7 @@
           <a:noFill/>
         </p:spPr>
         <p:txBody>
-          <a:bodyPr wrap="square" lIns="0" rIns="0" tIns="0" bIns="0" anchor="t">
+          <a:bodyPr wrap="square" lIns="0" tIns="0" rIns="0" bIns="0" anchor="t">
             <a:spAutoFit/>
           </a:bodyPr>
           <a:lstStyle/>
@@ -1527,7 +1529,7 @@
           <a:noFill/>
         </p:spPr>
         <p:txBody>
-          <a:bodyPr wrap="square" lIns="0" rIns="0" tIns="0" bIns="0" anchor="t">
+          <a:bodyPr wrap="square" lIns="0" tIns="0" rIns="0" bIns="0" anchor="t">
             <a:spAutoFit/>
           </a:bodyPr>
           <a:lstStyle/>
@@ -1566,7 +1568,7 @@
           <a:noFill/>
         </p:spPr>
         <p:txBody>
-          <a:bodyPr wrap="square" lIns="0" rIns="0" tIns="0" bIns="0" anchor="t">
+          <a:bodyPr wrap="square" lIns="0" tIns="0" rIns="0" bIns="0" anchor="t">
             <a:spAutoFit/>
           </a:bodyPr>
           <a:lstStyle/>
@@ -1686,7 +1688,7 @@
           <a:noFill/>
         </p:spPr>
         <p:txBody>
-          <a:bodyPr wrap="square" lIns="0" rIns="0" tIns="0" bIns="0" anchor="t">
+          <a:bodyPr wrap="square" lIns="0" tIns="0" rIns="0" bIns="0" anchor="t">
             <a:spAutoFit/>
           </a:bodyPr>
           <a:lstStyle/>
@@ -1725,7 +1727,7 @@
           <a:noFill/>
         </p:spPr>
         <p:txBody>
-          <a:bodyPr wrap="square" lIns="0" rIns="0" tIns="0" bIns="0" anchor="t">
+          <a:bodyPr wrap="square" lIns="0" tIns="0" rIns="0" bIns="0" anchor="t">
             <a:spAutoFit/>
           </a:bodyPr>
           <a:lstStyle/>
@@ -1762,18 +1764,36 @@
         <a:graphic>
           <a:graphicData uri="http://schemas.openxmlformats.org/drawingml/2006/table">
             <a:tbl>
-              <a:tblPr firstRow="0" bandRow="0">
+              <a:tblPr>
                 <a:tableStyleId>{2D5ABB26-0587-4C30-8999-92F81FD0307C}</a:tableStyleId>
               </a:tblPr>
               <a:tblGrid>
-                <a:gridCol w="777240"/>
-                <a:gridCol w="2148840"/>
-                <a:gridCol w="1645920"/>
+                <a:gridCol w="777240">
+                  <a:extLst>
+                    <a:ext uri="{9D8B030D-6E8A-4147-A177-3AD203B41FA5}">
+                      <a16:colId xmlns:a16="http://schemas.microsoft.com/office/drawing/2014/main" val="20000"/>
+                    </a:ext>
+                  </a:extLst>
+                </a:gridCol>
+                <a:gridCol w="2148840">
+                  <a:extLst>
+                    <a:ext uri="{9D8B030D-6E8A-4147-A177-3AD203B41FA5}">
+                      <a16:colId xmlns:a16="http://schemas.microsoft.com/office/drawing/2014/main" val="20001"/>
+                    </a:ext>
+                  </a:extLst>
+                </a:gridCol>
+                <a:gridCol w="1645920">
+                  <a:extLst>
+                    <a:ext uri="{9D8B030D-6E8A-4147-A177-3AD203B41FA5}">
+                      <a16:colId xmlns:a16="http://schemas.microsoft.com/office/drawing/2014/main" val="20002"/>
+                    </a:ext>
+                  </a:extLst>
+                </a:gridCol>
               </a:tblGrid>
               <a:tr h="329184">
                 <a:tc>
                   <a:txBody>
-                    <a:bodyPr wrap="square"/>
+                    <a:bodyPr/>
                     <a:lstStyle/>
                     <a:p>
                       <a:r>
@@ -1795,7 +1815,7 @@
                 </a:tc>
                 <a:tc>
                   <a:txBody>
-                    <a:bodyPr wrap="square"/>
+                    <a:bodyPr/>
                     <a:lstStyle/>
                     <a:p>
                       <a:r>
@@ -1817,7 +1837,7 @@
                 </a:tc>
                 <a:tc>
                   <a:txBody>
-                    <a:bodyPr wrap="square"/>
+                    <a:bodyPr/>
                     <a:lstStyle/>
                     <a:p>
                       <a:r>
@@ -1837,11 +1857,16 @@
                     </a:solidFill>
                   </a:tcPr>
                 </a:tc>
+                <a:extLst>
+                  <a:ext uri="{0D108BD9-81ED-4DB2-BD59-A6C34878D82A}">
+                    <a16:rowId xmlns:a16="http://schemas.microsoft.com/office/drawing/2014/main" val="10000"/>
+                  </a:ext>
+                </a:extLst>
               </a:tr>
               <a:tr h="329184">
                 <a:tc>
                   <a:txBody>
-                    <a:bodyPr wrap="square"/>
+                    <a:bodyPr/>
                     <a:lstStyle/>
                     <a:p>
                       <a:r>
@@ -1863,7 +1888,7 @@
                 </a:tc>
                 <a:tc>
                   <a:txBody>
-                    <a:bodyPr wrap="square"/>
+                    <a:bodyPr/>
                     <a:lstStyle/>
                     <a:p>
                       <a:r>
@@ -1885,7 +1910,7 @@
                 </a:tc>
                 <a:tc>
                   <a:txBody>
-                    <a:bodyPr wrap="square"/>
+                    <a:bodyPr/>
                     <a:lstStyle/>
                     <a:p>
                       <a:r>
@@ -1905,11 +1930,16 @@
                     </a:solidFill>
                   </a:tcPr>
                 </a:tc>
+                <a:extLst>
+                  <a:ext uri="{0D108BD9-81ED-4DB2-BD59-A6C34878D82A}">
+                    <a16:rowId xmlns:a16="http://schemas.microsoft.com/office/drawing/2014/main" val="10001"/>
+                  </a:ext>
+                </a:extLst>
               </a:tr>
               <a:tr h="329184">
                 <a:tc>
                   <a:txBody>
-                    <a:bodyPr wrap="square"/>
+                    <a:bodyPr/>
                     <a:lstStyle/>
                     <a:p>
                       <a:r>
@@ -1931,7 +1961,7 @@
                 </a:tc>
                 <a:tc>
                   <a:txBody>
-                    <a:bodyPr wrap="square"/>
+                    <a:bodyPr/>
                     <a:lstStyle/>
                     <a:p>
                       <a:r>
@@ -1953,7 +1983,7 @@
                 </a:tc>
                 <a:tc>
                   <a:txBody>
-                    <a:bodyPr wrap="square"/>
+                    <a:bodyPr/>
                     <a:lstStyle/>
                     <a:p>
                       <a:r>
@@ -1973,11 +2003,16 @@
                     </a:solidFill>
                   </a:tcPr>
                 </a:tc>
+                <a:extLst>
+                  <a:ext uri="{0D108BD9-81ED-4DB2-BD59-A6C34878D82A}">
+                    <a16:rowId xmlns:a16="http://schemas.microsoft.com/office/drawing/2014/main" val="10002"/>
+                  </a:ext>
+                </a:extLst>
               </a:tr>
               <a:tr h="329184">
                 <a:tc>
                   <a:txBody>
-                    <a:bodyPr wrap="square"/>
+                    <a:bodyPr/>
                     <a:lstStyle/>
                     <a:p>
                       <a:r>
@@ -1999,7 +2034,7 @@
                 </a:tc>
                 <a:tc>
                   <a:txBody>
-                    <a:bodyPr wrap="square"/>
+                    <a:bodyPr/>
                     <a:lstStyle/>
                     <a:p>
                       <a:r>
@@ -2021,7 +2056,7 @@
                 </a:tc>
                 <a:tc>
                   <a:txBody>
-                    <a:bodyPr wrap="square"/>
+                    <a:bodyPr/>
                     <a:lstStyle/>
                     <a:p>
                       <a:r>
@@ -2041,11 +2076,16 @@
                     </a:solidFill>
                   </a:tcPr>
                 </a:tc>
+                <a:extLst>
+                  <a:ext uri="{0D108BD9-81ED-4DB2-BD59-A6C34878D82A}">
+                    <a16:rowId xmlns:a16="http://schemas.microsoft.com/office/drawing/2014/main" val="10003"/>
+                  </a:ext>
+                </a:extLst>
               </a:tr>
               <a:tr h="329184">
                 <a:tc>
                   <a:txBody>
-                    <a:bodyPr wrap="square"/>
+                    <a:bodyPr/>
                     <a:lstStyle/>
                     <a:p>
                       <a:r>
@@ -2067,7 +2107,7 @@
                 </a:tc>
                 <a:tc>
                   <a:txBody>
-                    <a:bodyPr wrap="square"/>
+                    <a:bodyPr/>
                     <a:lstStyle/>
                     <a:p>
                       <a:r>
@@ -2089,7 +2129,7 @@
                 </a:tc>
                 <a:tc>
                   <a:txBody>
-                    <a:bodyPr wrap="square"/>
+                    <a:bodyPr/>
                     <a:lstStyle/>
                     <a:p>
                       <a:r>
@@ -2109,11 +2149,16 @@
                     </a:solidFill>
                   </a:tcPr>
                 </a:tc>
+                <a:extLst>
+                  <a:ext uri="{0D108BD9-81ED-4DB2-BD59-A6C34878D82A}">
+                    <a16:rowId xmlns:a16="http://schemas.microsoft.com/office/drawing/2014/main" val="10004"/>
+                  </a:ext>
+                </a:extLst>
               </a:tr>
               <a:tr h="329184">
                 <a:tc>
                   <a:txBody>
-                    <a:bodyPr wrap="square"/>
+                    <a:bodyPr/>
                     <a:lstStyle/>
                     <a:p>
                       <a:r>
@@ -2135,7 +2180,7 @@
                 </a:tc>
                 <a:tc>
                   <a:txBody>
-                    <a:bodyPr wrap="square"/>
+                    <a:bodyPr/>
                     <a:lstStyle/>
                     <a:p>
                       <a:r>
@@ -2157,7 +2202,7 @@
                 </a:tc>
                 <a:tc>
                   <a:txBody>
-                    <a:bodyPr wrap="square"/>
+                    <a:bodyPr/>
                     <a:lstStyle/>
                     <a:p>
                       <a:r>
@@ -2177,11 +2222,16 @@
                     </a:solidFill>
                   </a:tcPr>
                 </a:tc>
+                <a:extLst>
+                  <a:ext uri="{0D108BD9-81ED-4DB2-BD59-A6C34878D82A}">
+                    <a16:rowId xmlns:a16="http://schemas.microsoft.com/office/drawing/2014/main" val="10005"/>
+                  </a:ext>
+                </a:extLst>
               </a:tr>
               <a:tr h="329184">
                 <a:tc>
                   <a:txBody>
-                    <a:bodyPr wrap="square"/>
+                    <a:bodyPr/>
                     <a:lstStyle/>
                     <a:p>
                       <a:r>
@@ -2203,7 +2253,7 @@
                 </a:tc>
                 <a:tc>
                   <a:txBody>
-                    <a:bodyPr wrap="square"/>
+                    <a:bodyPr/>
                     <a:lstStyle/>
                     <a:p>
                       <a:r>
@@ -2225,7 +2275,7 @@
                 </a:tc>
                 <a:tc>
                   <a:txBody>
-                    <a:bodyPr wrap="square"/>
+                    <a:bodyPr/>
                     <a:lstStyle/>
                     <a:p>
                       <a:r>
@@ -2245,11 +2295,16 @@
                     </a:solidFill>
                   </a:tcPr>
                 </a:tc>
+                <a:extLst>
+                  <a:ext uri="{0D108BD9-81ED-4DB2-BD59-A6C34878D82A}">
+                    <a16:rowId xmlns:a16="http://schemas.microsoft.com/office/drawing/2014/main" val="10006"/>
+                  </a:ext>
+                </a:extLst>
               </a:tr>
               <a:tr h="329184">
                 <a:tc>
                   <a:txBody>
-                    <a:bodyPr wrap="square"/>
+                    <a:bodyPr/>
                     <a:lstStyle/>
                     <a:p>
                       <a:r>
@@ -2271,7 +2326,7 @@
                 </a:tc>
                 <a:tc>
                   <a:txBody>
-                    <a:bodyPr wrap="square"/>
+                    <a:bodyPr/>
                     <a:lstStyle/>
                     <a:p>
                       <a:r>
@@ -2293,7 +2348,7 @@
                 </a:tc>
                 <a:tc>
                   <a:txBody>
-                    <a:bodyPr wrap="square"/>
+                    <a:bodyPr/>
                     <a:lstStyle/>
                     <a:p>
                       <a:r>
@@ -2313,11 +2368,16 @@
                     </a:solidFill>
                   </a:tcPr>
                 </a:tc>
+                <a:extLst>
+                  <a:ext uri="{0D108BD9-81ED-4DB2-BD59-A6C34878D82A}">
+                    <a16:rowId xmlns:a16="http://schemas.microsoft.com/office/drawing/2014/main" val="10007"/>
+                  </a:ext>
+                </a:extLst>
               </a:tr>
               <a:tr h="329184">
                 <a:tc>
                   <a:txBody>
-                    <a:bodyPr wrap="square"/>
+                    <a:bodyPr/>
                     <a:lstStyle/>
                     <a:p>
                       <a:r>
@@ -2339,7 +2399,7 @@
                 </a:tc>
                 <a:tc>
                   <a:txBody>
-                    <a:bodyPr wrap="square"/>
+                    <a:bodyPr/>
                     <a:lstStyle/>
                     <a:p>
                       <a:r>
@@ -2361,7 +2421,7 @@
                 </a:tc>
                 <a:tc>
                   <a:txBody>
-                    <a:bodyPr wrap="square"/>
+                    <a:bodyPr/>
                     <a:lstStyle/>
                     <a:p>
                       <a:r>
@@ -2381,6 +2441,11 @@
                     </a:solidFill>
                   </a:tcPr>
                 </a:tc>
+                <a:extLst>
+                  <a:ext uri="{0D108BD9-81ED-4DB2-BD59-A6C34878D82A}">
+                    <a16:rowId xmlns:a16="http://schemas.microsoft.com/office/drawing/2014/main" val="10008"/>
+                  </a:ext>
+                </a:extLst>
               </a:tr>
             </a:tbl>
           </a:graphicData>
@@ -2403,7 +2468,7 @@
           <a:noFill/>
         </p:spPr>
         <p:txBody>
-          <a:bodyPr wrap="square" lIns="0" rIns="0" tIns="0" bIns="0" anchor="t">
+          <a:bodyPr wrap="square" lIns="0" tIns="0" rIns="0" bIns="0" anchor="t">
             <a:spAutoFit/>
           </a:bodyPr>
           <a:lstStyle/>
@@ -2440,20 +2505,50 @@
         <a:graphic>
           <a:graphicData uri="http://schemas.openxmlformats.org/drawingml/2006/table">
             <a:tbl>
-              <a:tblPr firstRow="0" bandRow="0">
+              <a:tblPr>
                 <a:tableStyleId>{2D5ABB26-0587-4C30-8999-92F81FD0307C}</a:tableStyleId>
               </a:tblPr>
               <a:tblGrid>
-                <a:gridCol w="1051560"/>
-                <a:gridCol w="1783080"/>
-                <a:gridCol w="1325880"/>
-                <a:gridCol w="658368"/>
-                <a:gridCol w="1371600"/>
+                <a:gridCol w="1051560">
+                  <a:extLst>
+                    <a:ext uri="{9D8B030D-6E8A-4147-A177-3AD203B41FA5}">
+                      <a16:colId xmlns:a16="http://schemas.microsoft.com/office/drawing/2014/main" val="20000"/>
+                    </a:ext>
+                  </a:extLst>
+                </a:gridCol>
+                <a:gridCol w="1783080">
+                  <a:extLst>
+                    <a:ext uri="{9D8B030D-6E8A-4147-A177-3AD203B41FA5}">
+                      <a16:colId xmlns:a16="http://schemas.microsoft.com/office/drawing/2014/main" val="20001"/>
+                    </a:ext>
+                  </a:extLst>
+                </a:gridCol>
+                <a:gridCol w="1325880">
+                  <a:extLst>
+                    <a:ext uri="{9D8B030D-6E8A-4147-A177-3AD203B41FA5}">
+                      <a16:colId xmlns:a16="http://schemas.microsoft.com/office/drawing/2014/main" val="20002"/>
+                    </a:ext>
+                  </a:extLst>
+                </a:gridCol>
+                <a:gridCol w="658368">
+                  <a:extLst>
+                    <a:ext uri="{9D8B030D-6E8A-4147-A177-3AD203B41FA5}">
+                      <a16:colId xmlns:a16="http://schemas.microsoft.com/office/drawing/2014/main" val="20003"/>
+                    </a:ext>
+                  </a:extLst>
+                </a:gridCol>
+                <a:gridCol w="1371600">
+                  <a:extLst>
+                    <a:ext uri="{9D8B030D-6E8A-4147-A177-3AD203B41FA5}">
+                      <a16:colId xmlns:a16="http://schemas.microsoft.com/office/drawing/2014/main" val="20004"/>
+                    </a:ext>
+                  </a:extLst>
+                </a:gridCol>
               </a:tblGrid>
               <a:tr h="294436">
                 <a:tc>
                   <a:txBody>
-                    <a:bodyPr wrap="square"/>
+                    <a:bodyPr/>
                     <a:lstStyle/>
                     <a:p>
                       <a:r>
@@ -2475,7 +2570,7 @@
                 </a:tc>
                 <a:tc>
                   <a:txBody>
-                    <a:bodyPr wrap="square"/>
+                    <a:bodyPr/>
                     <a:lstStyle/>
                     <a:p>
                       <a:r>
@@ -2497,7 +2592,7 @@
                 </a:tc>
                 <a:tc>
                   <a:txBody>
-                    <a:bodyPr wrap="square"/>
+                    <a:bodyPr/>
                     <a:lstStyle/>
                     <a:p>
                       <a:r>
@@ -2519,7 +2614,7 @@
                 </a:tc>
                 <a:tc>
                   <a:txBody>
-                    <a:bodyPr wrap="square"/>
+                    <a:bodyPr/>
                     <a:lstStyle/>
                     <a:p>
                       <a:r>
@@ -2541,7 +2636,7 @@
                 </a:tc>
                 <a:tc>
                   <a:txBody>
-                    <a:bodyPr wrap="square"/>
+                    <a:bodyPr/>
                     <a:lstStyle/>
                     <a:p>
                       <a:r>
@@ -2561,11 +2656,16 @@
                     </a:solidFill>
                   </a:tcPr>
                 </a:tc>
+                <a:extLst>
+                  <a:ext uri="{0D108BD9-81ED-4DB2-BD59-A6C34878D82A}">
+                    <a16:rowId xmlns:a16="http://schemas.microsoft.com/office/drawing/2014/main" val="10000"/>
+                  </a:ext>
+                </a:extLst>
               </a:tr>
               <a:tr h="294436">
                 <a:tc>
                   <a:txBody>
-                    <a:bodyPr wrap="square"/>
+                    <a:bodyPr/>
                     <a:lstStyle/>
                     <a:p>
                       <a:r>
@@ -2587,7 +2687,7 @@
                 </a:tc>
                 <a:tc>
                   <a:txBody>
-                    <a:bodyPr wrap="square"/>
+                    <a:bodyPr/>
                     <a:lstStyle/>
                     <a:p>
                       <a:r>
@@ -2609,7 +2709,7 @@
                 </a:tc>
                 <a:tc>
                   <a:txBody>
-                    <a:bodyPr wrap="square"/>
+                    <a:bodyPr/>
                     <a:lstStyle/>
                     <a:p>
                       <a:r>
@@ -2631,7 +2731,7 @@
                 </a:tc>
                 <a:tc>
                   <a:txBody>
-                    <a:bodyPr wrap="square"/>
+                    <a:bodyPr/>
                     <a:lstStyle/>
                     <a:p>
                       <a:r>
@@ -2653,7 +2753,7 @@
                 </a:tc>
                 <a:tc>
                   <a:txBody>
-                    <a:bodyPr wrap="square"/>
+                    <a:bodyPr/>
                     <a:lstStyle/>
                     <a:p>
                       <a:r>
@@ -2673,11 +2773,16 @@
                     </a:solidFill>
                   </a:tcPr>
                 </a:tc>
+                <a:extLst>
+                  <a:ext uri="{0D108BD9-81ED-4DB2-BD59-A6C34878D82A}">
+                    <a16:rowId xmlns:a16="http://schemas.microsoft.com/office/drawing/2014/main" val="10001"/>
+                  </a:ext>
+                </a:extLst>
               </a:tr>
               <a:tr h="294436">
                 <a:tc>
                   <a:txBody>
-                    <a:bodyPr wrap="square"/>
+                    <a:bodyPr/>
                     <a:lstStyle/>
                     <a:p>
                       <a:r>
@@ -2699,7 +2804,7 @@
                 </a:tc>
                 <a:tc>
                   <a:txBody>
-                    <a:bodyPr wrap="square"/>
+                    <a:bodyPr/>
                     <a:lstStyle/>
                     <a:p>
                       <a:r>
@@ -2721,7 +2826,7 @@
                 </a:tc>
                 <a:tc>
                   <a:txBody>
-                    <a:bodyPr wrap="square"/>
+                    <a:bodyPr/>
                     <a:lstStyle/>
                     <a:p>
                       <a:r>
@@ -2743,7 +2848,7 @@
                 </a:tc>
                 <a:tc>
                   <a:txBody>
-                    <a:bodyPr wrap="square"/>
+                    <a:bodyPr/>
                     <a:lstStyle/>
                     <a:p>
                       <a:r>
@@ -2765,7 +2870,7 @@
                 </a:tc>
                 <a:tc>
                   <a:txBody>
-                    <a:bodyPr wrap="square"/>
+                    <a:bodyPr/>
                     <a:lstStyle/>
                     <a:p>
                       <a:r>
@@ -2785,11 +2890,16 @@
                     </a:solidFill>
                   </a:tcPr>
                 </a:tc>
+                <a:extLst>
+                  <a:ext uri="{0D108BD9-81ED-4DB2-BD59-A6C34878D82A}">
+                    <a16:rowId xmlns:a16="http://schemas.microsoft.com/office/drawing/2014/main" val="10002"/>
+                  </a:ext>
+                </a:extLst>
               </a:tr>
               <a:tr h="294436">
                 <a:tc>
                   <a:txBody>
-                    <a:bodyPr wrap="square"/>
+                    <a:bodyPr/>
                     <a:lstStyle/>
                     <a:p>
                       <a:r>
@@ -2811,7 +2921,7 @@
                 </a:tc>
                 <a:tc>
                   <a:txBody>
-                    <a:bodyPr wrap="square"/>
+                    <a:bodyPr/>
                     <a:lstStyle/>
                     <a:p>
                       <a:r>
@@ -2833,7 +2943,7 @@
                 </a:tc>
                 <a:tc>
                   <a:txBody>
-                    <a:bodyPr wrap="square"/>
+                    <a:bodyPr/>
                     <a:lstStyle/>
                     <a:p>
                       <a:r>
@@ -2855,7 +2965,7 @@
                 </a:tc>
                 <a:tc>
                   <a:txBody>
-                    <a:bodyPr wrap="square"/>
+                    <a:bodyPr/>
                     <a:lstStyle/>
                     <a:p>
                       <a:r>
@@ -2877,7 +2987,7 @@
                 </a:tc>
                 <a:tc>
                   <a:txBody>
-                    <a:bodyPr wrap="square"/>
+                    <a:bodyPr/>
                     <a:lstStyle/>
                     <a:p>
                       <a:r>
@@ -2897,11 +3007,16 @@
                     </a:solidFill>
                   </a:tcPr>
                 </a:tc>
+                <a:extLst>
+                  <a:ext uri="{0D108BD9-81ED-4DB2-BD59-A6C34878D82A}">
+                    <a16:rowId xmlns:a16="http://schemas.microsoft.com/office/drawing/2014/main" val="10003"/>
+                  </a:ext>
+                </a:extLst>
               </a:tr>
               <a:tr h="294436">
                 <a:tc>
                   <a:txBody>
-                    <a:bodyPr wrap="square"/>
+                    <a:bodyPr/>
                     <a:lstStyle/>
                     <a:p>
                       <a:r>
@@ -2923,7 +3038,7 @@
                 </a:tc>
                 <a:tc>
                   <a:txBody>
-                    <a:bodyPr wrap="square"/>
+                    <a:bodyPr/>
                     <a:lstStyle/>
                     <a:p>
                       <a:r>
@@ -2945,7 +3060,7 @@
                 </a:tc>
                 <a:tc>
                   <a:txBody>
-                    <a:bodyPr wrap="square"/>
+                    <a:bodyPr/>
                     <a:lstStyle/>
                     <a:p>
                       <a:r>
@@ -2967,7 +3082,7 @@
                 </a:tc>
                 <a:tc>
                   <a:txBody>
-                    <a:bodyPr wrap="square"/>
+                    <a:bodyPr/>
                     <a:lstStyle/>
                     <a:p>
                       <a:r>
@@ -2989,7 +3104,7 @@
                 </a:tc>
                 <a:tc>
                   <a:txBody>
-                    <a:bodyPr wrap="square"/>
+                    <a:bodyPr/>
                     <a:lstStyle/>
                     <a:p>
                       <a:r>
@@ -3009,11 +3124,16 @@
                     </a:solidFill>
                   </a:tcPr>
                 </a:tc>
+                <a:extLst>
+                  <a:ext uri="{0D108BD9-81ED-4DB2-BD59-A6C34878D82A}">
+                    <a16:rowId xmlns:a16="http://schemas.microsoft.com/office/drawing/2014/main" val="10004"/>
+                  </a:ext>
+                </a:extLst>
               </a:tr>
               <a:tr h="294436">
                 <a:tc>
                   <a:txBody>
-                    <a:bodyPr wrap="square"/>
+                    <a:bodyPr/>
                     <a:lstStyle/>
                     <a:p>
                       <a:r>
@@ -3035,7 +3155,7 @@
                 </a:tc>
                 <a:tc>
                   <a:txBody>
-                    <a:bodyPr wrap="square"/>
+                    <a:bodyPr/>
                     <a:lstStyle/>
                     <a:p>
                       <a:r>
@@ -3057,7 +3177,7 @@
                 </a:tc>
                 <a:tc>
                   <a:txBody>
-                    <a:bodyPr wrap="square"/>
+                    <a:bodyPr/>
                     <a:lstStyle/>
                     <a:p>
                       <a:r>
@@ -3079,7 +3199,7 @@
                 </a:tc>
                 <a:tc>
                   <a:txBody>
-                    <a:bodyPr wrap="square"/>
+                    <a:bodyPr/>
                     <a:lstStyle/>
                     <a:p>
                       <a:r>
@@ -3101,7 +3221,7 @@
                 </a:tc>
                 <a:tc>
                   <a:txBody>
-                    <a:bodyPr wrap="square"/>
+                    <a:bodyPr/>
                     <a:lstStyle/>
                     <a:p>
                       <a:r>
@@ -3121,11 +3241,16 @@
                     </a:solidFill>
                   </a:tcPr>
                 </a:tc>
+                <a:extLst>
+                  <a:ext uri="{0D108BD9-81ED-4DB2-BD59-A6C34878D82A}">
+                    <a16:rowId xmlns:a16="http://schemas.microsoft.com/office/drawing/2014/main" val="10005"/>
+                  </a:ext>
+                </a:extLst>
               </a:tr>
               <a:tr h="294436">
                 <a:tc>
                   <a:txBody>
-                    <a:bodyPr wrap="square"/>
+                    <a:bodyPr/>
                     <a:lstStyle/>
                     <a:p>
                       <a:r>
@@ -3147,7 +3272,7 @@
                 </a:tc>
                 <a:tc>
                   <a:txBody>
-                    <a:bodyPr wrap="square"/>
+                    <a:bodyPr/>
                     <a:lstStyle/>
                     <a:p>
                       <a:r>
@@ -3169,7 +3294,7 @@
                 </a:tc>
                 <a:tc>
                   <a:txBody>
-                    <a:bodyPr wrap="square"/>
+                    <a:bodyPr/>
                     <a:lstStyle/>
                     <a:p>
                       <a:r>
@@ -3191,7 +3316,7 @@
                 </a:tc>
                 <a:tc>
                   <a:txBody>
-                    <a:bodyPr wrap="square"/>
+                    <a:bodyPr/>
                     <a:lstStyle/>
                     <a:p>
                       <a:r>
@@ -3213,7 +3338,7 @@
                 </a:tc>
                 <a:tc>
                   <a:txBody>
-                    <a:bodyPr wrap="square"/>
+                    <a:bodyPr/>
                     <a:lstStyle/>
                     <a:p>
                       <a:r>
@@ -3233,11 +3358,16 @@
                     </a:solidFill>
                   </a:tcPr>
                 </a:tc>
+                <a:extLst>
+                  <a:ext uri="{0D108BD9-81ED-4DB2-BD59-A6C34878D82A}">
+                    <a16:rowId xmlns:a16="http://schemas.microsoft.com/office/drawing/2014/main" val="10006"/>
+                  </a:ext>
+                </a:extLst>
               </a:tr>
               <a:tr h="294436">
                 <a:tc>
                   <a:txBody>
-                    <a:bodyPr wrap="square"/>
+                    <a:bodyPr/>
                     <a:lstStyle/>
                     <a:p>
                       <a:r>
@@ -3259,7 +3389,7 @@
                 </a:tc>
                 <a:tc>
                   <a:txBody>
-                    <a:bodyPr wrap="square"/>
+                    <a:bodyPr/>
                     <a:lstStyle/>
                     <a:p>
                       <a:r>
@@ -3281,7 +3411,7 @@
                 </a:tc>
                 <a:tc>
                   <a:txBody>
-                    <a:bodyPr wrap="square"/>
+                    <a:bodyPr/>
                     <a:lstStyle/>
                     <a:p>
                       <a:r>
@@ -3303,7 +3433,7 @@
                 </a:tc>
                 <a:tc>
                   <a:txBody>
-                    <a:bodyPr wrap="square"/>
+                    <a:bodyPr/>
                     <a:lstStyle/>
                     <a:p>
                       <a:r>
@@ -3325,7 +3455,7 @@
                 </a:tc>
                 <a:tc>
                   <a:txBody>
-                    <a:bodyPr wrap="square"/>
+                    <a:bodyPr/>
                     <a:lstStyle/>
                     <a:p>
                       <a:r>
@@ -3345,11 +3475,16 @@
                     </a:solidFill>
                   </a:tcPr>
                 </a:tc>
+                <a:extLst>
+                  <a:ext uri="{0D108BD9-81ED-4DB2-BD59-A6C34878D82A}">
+                    <a16:rowId xmlns:a16="http://schemas.microsoft.com/office/drawing/2014/main" val="10007"/>
+                  </a:ext>
+                </a:extLst>
               </a:tr>
               <a:tr h="294436">
                 <a:tc>
                   <a:txBody>
-                    <a:bodyPr wrap="square"/>
+                    <a:bodyPr/>
                     <a:lstStyle/>
                     <a:p>
                       <a:r>
@@ -3371,7 +3506,7 @@
                 </a:tc>
                 <a:tc>
                   <a:txBody>
-                    <a:bodyPr wrap="square"/>
+                    <a:bodyPr/>
                     <a:lstStyle/>
                     <a:p>
                       <a:r>
@@ -3393,7 +3528,7 @@
                 </a:tc>
                 <a:tc>
                   <a:txBody>
-                    <a:bodyPr wrap="square"/>
+                    <a:bodyPr/>
                     <a:lstStyle/>
                     <a:p>
                       <a:r>
@@ -3415,7 +3550,7 @@
                 </a:tc>
                 <a:tc>
                   <a:txBody>
-                    <a:bodyPr wrap="square"/>
+                    <a:bodyPr/>
                     <a:lstStyle/>
                     <a:p>
                       <a:r>
@@ -3437,7 +3572,7 @@
                 </a:tc>
                 <a:tc>
                   <a:txBody>
-                    <a:bodyPr wrap="square"/>
+                    <a:bodyPr/>
                     <a:lstStyle/>
                     <a:p>
                       <a:r>
@@ -3457,11 +3592,16 @@
                     </a:solidFill>
                   </a:tcPr>
                 </a:tc>
+                <a:extLst>
+                  <a:ext uri="{0D108BD9-81ED-4DB2-BD59-A6C34878D82A}">
+                    <a16:rowId xmlns:a16="http://schemas.microsoft.com/office/drawing/2014/main" val="10008"/>
+                  </a:ext>
+                </a:extLst>
               </a:tr>
               <a:tr h="294436">
                 <a:tc>
                   <a:txBody>
-                    <a:bodyPr wrap="square"/>
+                    <a:bodyPr/>
                     <a:lstStyle/>
                     <a:p>
                       <a:r>
@@ -3483,7 +3623,7 @@
                 </a:tc>
                 <a:tc>
                   <a:txBody>
-                    <a:bodyPr wrap="square"/>
+                    <a:bodyPr/>
                     <a:lstStyle/>
                     <a:p>
                       <a:r>
@@ -3505,7 +3645,7 @@
                 </a:tc>
                 <a:tc>
                   <a:txBody>
-                    <a:bodyPr wrap="square"/>
+                    <a:bodyPr/>
                     <a:lstStyle/>
                     <a:p>
                       <a:r>
@@ -3527,7 +3667,7 @@
                 </a:tc>
                 <a:tc>
                   <a:txBody>
-                    <a:bodyPr wrap="square"/>
+                    <a:bodyPr/>
                     <a:lstStyle/>
                     <a:p>
                       <a:r>
@@ -3549,7 +3689,7 @@
                 </a:tc>
                 <a:tc>
                   <a:txBody>
-                    <a:bodyPr wrap="square"/>
+                    <a:bodyPr/>
                     <a:lstStyle/>
                     <a:p>
                       <a:r>
@@ -3569,11 +3709,16 @@
                     </a:solidFill>
                   </a:tcPr>
                 </a:tc>
+                <a:extLst>
+                  <a:ext uri="{0D108BD9-81ED-4DB2-BD59-A6C34878D82A}">
+                    <a16:rowId xmlns:a16="http://schemas.microsoft.com/office/drawing/2014/main" val="10009"/>
+                  </a:ext>
+                </a:extLst>
               </a:tr>
               <a:tr h="294436">
                 <a:tc>
                   <a:txBody>
-                    <a:bodyPr wrap="square"/>
+                    <a:bodyPr/>
                     <a:lstStyle/>
                     <a:p>
                       <a:r>
@@ -3595,7 +3740,7 @@
                 </a:tc>
                 <a:tc>
                   <a:txBody>
-                    <a:bodyPr wrap="square"/>
+                    <a:bodyPr/>
                     <a:lstStyle/>
                     <a:p>
                       <a:r>
@@ -3617,7 +3762,7 @@
                 </a:tc>
                 <a:tc>
                   <a:txBody>
-                    <a:bodyPr wrap="square"/>
+                    <a:bodyPr/>
                     <a:lstStyle/>
                     <a:p>
                       <a:r>
@@ -3639,7 +3784,7 @@
                 </a:tc>
                 <a:tc>
                   <a:txBody>
-                    <a:bodyPr wrap="square"/>
+                    <a:bodyPr/>
                     <a:lstStyle/>
                     <a:p>
                       <a:r>
@@ -3661,7 +3806,7 @@
                 </a:tc>
                 <a:tc>
                   <a:txBody>
-                    <a:bodyPr wrap="square"/>
+                    <a:bodyPr/>
                     <a:lstStyle/>
                     <a:p>
                       <a:r>
@@ -3681,6 +3826,11 @@
                     </a:solidFill>
                   </a:tcPr>
                 </a:tc>
+                <a:extLst>
+                  <a:ext uri="{0D108BD9-81ED-4DB2-BD59-A6C34878D82A}">
+                    <a16:rowId xmlns:a16="http://schemas.microsoft.com/office/drawing/2014/main" val="10010"/>
+                  </a:ext>
+                </a:extLst>
               </a:tr>
             </a:tbl>
           </a:graphicData>
@@ -3729,6 +3879,7 @@
           <a:lstStyle/>
           <a:p>
             <a:pPr algn="ctr"/>
+            <a:endParaRPr/>
           </a:p>
         </p:txBody>
       </p:sp>
@@ -3741,7 +3892,7 @@
         <p:spPr>
           <a:xfrm>
             <a:off x="777240" y="4983480"/>
-            <a:ext cx="4251960" cy="1188720"/>
+            <a:ext cx="4251960" cy="682238"/>
           </a:xfrm>
           <a:prstGeom prst="rect">
             <a:avLst/>
@@ -3749,7 +3900,7 @@
           <a:noFill/>
         </p:spPr>
         <p:txBody>
-          <a:bodyPr wrap="square" lIns="0" rIns="0" tIns="0" bIns="0" anchor="t">
+          <a:bodyPr wrap="square" lIns="0" tIns="0" rIns="0" bIns="0" anchor="t">
             <a:spAutoFit/>
           </a:bodyPr>
           <a:lstStyle/>
@@ -3760,14 +3911,29 @@
               </a:spcAft>
             </a:pPr>
             <a:r>
-              <a:rPr sz="1150" b="1">
+              <a:rPr sz="1150" b="1" dirty="0">
                 <a:solidFill>
                   <a:srgbClr val="D9A66C"/>
                 </a:solidFill>
                 <a:latin typeface="IBM Plex Sans"/>
               </a:rPr>
-              <a:t>Cum se verifică</a:t>
-            </a:r>
+              <a:t>Cum se </a:t>
+            </a:r>
+            <a:r>
+              <a:rPr sz="1150" b="1" dirty="0" err="1">
+                <a:solidFill>
+                  <a:srgbClr val="D9A66C"/>
+                </a:solidFill>
+                <a:latin typeface="IBM Plex Sans"/>
+              </a:rPr>
+              <a:t>verifică</a:t>
+            </a:r>
+            <a:endParaRPr sz="1150" b="1" dirty="0">
+              <a:solidFill>
+                <a:srgbClr val="D9A66C"/>
+              </a:solidFill>
+              <a:latin typeface="IBM Plex Sans"/>
+            </a:endParaRPr>
           </a:p>
           <a:p>
             <a:pPr>
@@ -3776,7 +3942,7 @@
               </a:spcAft>
             </a:pPr>
             <a:r>
-              <a:rPr sz="900" b="1">
+              <a:rPr sz="900" b="1" dirty="0">
                 <a:solidFill>
                   <a:srgbClr val="F6F4EE"/>
                 </a:solidFill>
@@ -3785,13 +3951,31 @@
               <a:t>Repo: </a:t>
             </a:r>
             <a:r>
-              <a:rPr sz="900" b="0">
+              <a:rPr sz="900" b="0" dirty="0">
                 <a:solidFill>
                   <a:srgbClr val="D9A66C"/>
                 </a:solidFill>
                 <a:latin typeface="IBM Plex Sans"/>
               </a:rPr>
-              <a:t>github.com/davidgradea/ic3</a:t>
+              <a:t>github.com/</a:t>
+            </a:r>
+            <a:r>
+              <a:rPr sz="900" b="0" dirty="0" err="1">
+                <a:solidFill>
+                  <a:srgbClr val="D9A66C"/>
+                </a:solidFill>
+                <a:latin typeface="IBM Plex Sans"/>
+              </a:rPr>
+              <a:t>davidgradea</a:t>
+            </a:r>
+            <a:r>
+              <a:rPr sz="900" b="0" dirty="0">
+                <a:solidFill>
+                  <a:srgbClr val="D9A66C"/>
+                </a:solidFill>
+                <a:latin typeface="IBM Plex Sans"/>
+              </a:rPr>
+              <a:t>/ic3</a:t>
             </a:r>
           </a:p>
           <a:p>
@@ -3801,16 +3985,25 @@
               </a:spcAft>
             </a:pPr>
             <a:r>
-              <a:rPr sz="900" b="1">
+              <a:rPr sz="900" b="1" dirty="0" err="1">
                 <a:solidFill>
                   <a:srgbClr val="F6F4EE"/>
                 </a:solidFill>
                 <a:latin typeface="IBM Plex Sans"/>
               </a:rPr>
-              <a:t>Rulare: </a:t>
-            </a:r>
-            <a:r>
-              <a:rPr sz="850" b="0">
+              <a:t>Rulare</a:t>
+            </a:r>
+            <a:r>
+              <a:rPr sz="900" b="1" dirty="0">
+                <a:solidFill>
+                  <a:srgbClr val="F6F4EE"/>
+                </a:solidFill>
+                <a:latin typeface="IBM Plex Sans"/>
+              </a:rPr>
+              <a:t>: </a:t>
+            </a:r>
+            <a:r>
+              <a:rPr sz="850" b="0" dirty="0">
                 <a:solidFill>
                   <a:srgbClr val="BFC9D9"/>
                 </a:solidFill>
@@ -3826,7 +4019,7 @@
               </a:spcAft>
             </a:pPr>
             <a:r>
-              <a:rPr sz="900" b="1">
+              <a:rPr sz="900" b="1" dirty="0">
                 <a:solidFill>
                   <a:srgbClr val="F6F4EE"/>
                 </a:solidFill>
@@ -3835,39 +4028,83 @@
               <a:t>Ieșire: </a:t>
             </a:r>
             <a:r>
-              <a:rPr sz="850" b="0">
+              <a:rPr sz="850" b="0" dirty="0">
                 <a:solidFill>
                   <a:srgbClr val="BFC9D9"/>
                 </a:solidFill>
                 <a:latin typeface="IBM Plex Sans"/>
               </a:rPr>
-              <a:t>2.433/2.433 patch-uri complete; 35 S2 fără etichete excluse</a:t>
-            </a:r>
-          </a:p>
-          <a:p>
-            <a:pPr>
-              <a:spcAft>
-                <a:spcPts val="0"/>
-              </a:spcAft>
-            </a:pPr>
-            <a:r>
-              <a:rPr sz="900" b="1">
-                <a:solidFill>
-                  <a:srgbClr val="F6F4EE"/>
-                </a:solidFill>
-                <a:latin typeface="IBM Plex Sans"/>
-              </a:rPr>
-              <a:t>Pentru client: </a:t>
-            </a:r>
-            <a:r>
-              <a:rPr sz="850" b="0">
+              <a:t>2.433/2.433 patch-</a:t>
+            </a:r>
+            <a:r>
+              <a:rPr sz="850" b="0" dirty="0" err="1">
                 <a:solidFill>
                   <a:srgbClr val="BFC9D9"/>
                 </a:solidFill>
                 <a:latin typeface="IBM Plex Sans"/>
               </a:rPr>
-              <a:t>fără adaptare, harta RO ar marca greșit multe parcele.</a:t>
-            </a:r>
+              <a:t>uri</a:t>
+            </a:r>
+            <a:r>
+              <a:rPr sz="850" b="0" dirty="0">
+                <a:solidFill>
+                  <a:srgbClr val="BFC9D9"/>
+                </a:solidFill>
+                <a:latin typeface="IBM Plex Sans"/>
+              </a:rPr>
+              <a:t> complete; 35 S2 </a:t>
+            </a:r>
+            <a:r>
+              <a:rPr sz="850" b="0" dirty="0" err="1">
+                <a:solidFill>
+                  <a:srgbClr val="BFC9D9"/>
+                </a:solidFill>
+                <a:latin typeface="IBM Plex Sans"/>
+              </a:rPr>
+              <a:t>fără</a:t>
+            </a:r>
+            <a:r>
+              <a:rPr sz="850" b="0" dirty="0">
+                <a:solidFill>
+                  <a:srgbClr val="BFC9D9"/>
+                </a:solidFill>
+                <a:latin typeface="IBM Plex Sans"/>
+              </a:rPr>
+              <a:t> </a:t>
+            </a:r>
+            <a:r>
+              <a:rPr sz="850" b="0" dirty="0" err="1">
+                <a:solidFill>
+                  <a:srgbClr val="BFC9D9"/>
+                </a:solidFill>
+                <a:latin typeface="IBM Plex Sans"/>
+              </a:rPr>
+              <a:t>etichete</a:t>
+            </a:r>
+            <a:r>
+              <a:rPr sz="850" b="0" dirty="0">
+                <a:solidFill>
+                  <a:srgbClr val="BFC9D9"/>
+                </a:solidFill>
+                <a:latin typeface="IBM Plex Sans"/>
+              </a:rPr>
+              <a:t> </a:t>
+            </a:r>
+            <a:r>
+              <a:rPr sz="850" b="0" dirty="0" err="1">
+                <a:solidFill>
+                  <a:srgbClr val="BFC9D9"/>
+                </a:solidFill>
+                <a:latin typeface="IBM Plex Sans"/>
+              </a:rPr>
+              <a:t>excluse</a:t>
+            </a:r>
+            <a:endParaRPr sz="850" b="0" dirty="0">
+              <a:solidFill>
+                <a:srgbClr val="BFC9D9"/>
+              </a:solidFill>
+              <a:latin typeface="IBM Plex Sans"/>
+            </a:endParaRPr>
           </a:p>
         </p:txBody>
       </p:sp>
@@ -3888,7 +4125,7 @@
           <a:noFill/>
         </p:spPr>
         <p:txBody>
-          <a:bodyPr wrap="square" lIns="0" rIns="0" tIns="0" bIns="0" anchor="t">
+          <a:bodyPr wrap="square" lIns="0" tIns="0" rIns="0" bIns="0" anchor="t">
             <a:spAutoFit/>
           </a:bodyPr>
           <a:lstStyle/>
@@ -4008,7 +4245,7 @@
           <a:noFill/>
         </p:spPr>
         <p:txBody>
-          <a:bodyPr wrap="square" lIns="0" rIns="0" tIns="0" bIns="0" anchor="t">
+          <a:bodyPr wrap="square" lIns="0" tIns="0" rIns="0" bIns="0" anchor="t">
             <a:spAutoFit/>
           </a:bodyPr>
           <a:lstStyle/>
@@ -4073,6 +4310,7 @@
           <a:lstStyle/>
           <a:p>
             <a:pPr algn="ctr"/>
+            <a:endParaRPr/>
           </a:p>
         </p:txBody>
       </p:sp>
@@ -4085,7 +4323,7 @@
         <p:spPr>
           <a:xfrm>
             <a:off x="841248" y="1874519"/>
-            <a:ext cx="5120640" cy="3657600"/>
+            <a:ext cx="5120640" cy="1459374"/>
           </a:xfrm>
           <a:prstGeom prst="rect">
             <a:avLst/>
@@ -4093,7 +4331,7 @@
           <a:noFill/>
         </p:spPr>
         <p:txBody>
-          <a:bodyPr wrap="square" lIns="0" rIns="0" tIns="0" bIns="0" anchor="t">
+          <a:bodyPr wrap="square" lIns="0" tIns="0" rIns="0" bIns="0" anchor="t">
             <a:spAutoFit/>
           </a:bodyPr>
           <a:lstStyle/>
@@ -4104,7 +4342,7 @@
               </a:spcAft>
             </a:pPr>
             <a:r>
-              <a:rPr sz="1600" b="1">
+              <a:rPr sz="1600" b="1" dirty="0" err="1">
                 <a:solidFill>
                   <a:srgbClr val="1B2A41"/>
                 </a:solidFill>
@@ -4112,6 +4350,12 @@
               </a:rPr>
               <a:t>Blocaje</a:t>
             </a:r>
+            <a:endParaRPr sz="1600" b="1" dirty="0">
+              <a:solidFill>
+                <a:srgbClr val="1B2A41"/>
+              </a:solidFill>
+              <a:latin typeface="IBM Plex Sans"/>
+            </a:endParaRPr>
           </a:p>
           <a:p>
             <a:pPr>
@@ -4120,22 +4364,94 @@
               </a:spcAft>
             </a:pPr>
             <a:r>
-              <a:rPr sz="1250" b="1">
+              <a:rPr sz="1250" b="1" dirty="0">
                 <a:solidFill>
                   <a:srgbClr val="1B2A41"/>
                 </a:solidFill>
                 <a:latin typeface="IBM Plex Sans"/>
               </a:rPr>
-              <a:t>1. Nu există etichete RO publice </a:t>
-            </a:r>
-            <a:r>
-              <a:rPr sz="1250" b="0">
+              <a:t>1. Nu </a:t>
+            </a:r>
+            <a:r>
+              <a:rPr sz="1250" b="1" dirty="0" err="1">
+                <a:solidFill>
+                  <a:srgbClr val="1B2A41"/>
+                </a:solidFill>
+                <a:latin typeface="IBM Plex Sans"/>
+              </a:rPr>
+              <a:t>există</a:t>
+            </a:r>
+            <a:r>
+              <a:rPr sz="1250" b="1" dirty="0">
+                <a:solidFill>
+                  <a:srgbClr val="1B2A41"/>
+                </a:solidFill>
+                <a:latin typeface="IBM Plex Sans"/>
+              </a:rPr>
+              <a:t> </a:t>
+            </a:r>
+            <a:r>
+              <a:rPr sz="1250" b="1" dirty="0" err="1">
+                <a:solidFill>
+                  <a:srgbClr val="1B2A41"/>
+                </a:solidFill>
+                <a:latin typeface="IBM Plex Sans"/>
+              </a:rPr>
+              <a:t>etichete</a:t>
+            </a:r>
+            <a:r>
+              <a:rPr sz="1250" b="1" dirty="0">
+                <a:solidFill>
+                  <a:srgbClr val="1B2A41"/>
+                </a:solidFill>
+                <a:latin typeface="IBM Plex Sans"/>
+              </a:rPr>
+              <a:t> RO </a:t>
+            </a:r>
+            <a:r>
+              <a:rPr sz="1250" b="1" dirty="0" err="1">
+                <a:solidFill>
+                  <a:srgbClr val="1B2A41"/>
+                </a:solidFill>
+                <a:latin typeface="IBM Plex Sans"/>
+              </a:rPr>
+              <a:t>publice</a:t>
+            </a:r>
+            <a:r>
+              <a:rPr sz="1250" b="1" dirty="0">
+                <a:solidFill>
+                  <a:srgbClr val="1B2A41"/>
+                </a:solidFill>
+                <a:latin typeface="IBM Plex Sans"/>
+              </a:rPr>
+              <a:t> </a:t>
+            </a:r>
+            <a:r>
+              <a:rPr sz="1250" b="0" dirty="0">
                 <a:solidFill>
                   <a:srgbClr val="4A5568"/>
                 </a:solidFill>
                 <a:latin typeface="IBM Plex Sans"/>
               </a:rPr>
-              <a:t>(LPIS-ul APIA nu e deschis).</a:t>
+              <a:t>(LPIS-ul APIA nu e </a:t>
+            </a:r>
+            <a:r>
+              <a:rPr sz="1250" b="0" dirty="0" err="1">
+                <a:solidFill>
+                  <a:srgbClr val="4A5568"/>
+                </a:solidFill>
+                <a:latin typeface="IBM Plex Sans"/>
+              </a:rPr>
+              <a:t>deschis</a:t>
+            </a:r>
+            <a:r>
+              <a:rPr sz="1250" b="0" dirty="0">
+                <a:solidFill>
+                  <a:srgbClr val="4A5568"/>
+                </a:solidFill>
+                <a:latin typeface="IBM Plex Sans"/>
+              </a:rPr>
+              <a:t>).</a:t>
             </a:r>
           </a:p>
           <a:p>
@@ -4145,30 +4461,146 @@
               </a:spcAft>
             </a:pPr>
             <a:r>
-              <a:rPr sz="1150" b="0">
+              <a:rPr sz="1150" b="0" dirty="0">
                 <a:solidFill>
                   <a:srgbClr val="4A5568"/>
                 </a:solidFill>
                 <a:latin typeface="IBM Plex Sans"/>
               </a:rPr>
-              <a:t>→ Încerc: etichetez 30–50 parcele cu cultură clară, după un protocol scris.</a:t>
-            </a:r>
-          </a:p>
-          <a:p>
-            <a:pPr>
-              <a:spcAft>
-                <a:spcPts val="1200"/>
-              </a:spcAft>
-            </a:pPr>
-            <a:r>
-              <a:rPr sz="1150" b="0">
-                <a:solidFill>
-                  <a:srgbClr val="C8702A"/>
-                </a:solidFill>
-                <a:latin typeface="IBM Plex Sans"/>
-              </a:rPr>
-              <a:t>→ Am nevoie: acord pentru DACIA5 (Brașov, etichete din teren) ca test extern.</a:t>
-            </a:r>
+              <a:t>→ </a:t>
+            </a:r>
+            <a:r>
+              <a:rPr sz="1150" b="0" dirty="0" err="1">
+                <a:solidFill>
+                  <a:srgbClr val="4A5568"/>
+                </a:solidFill>
+                <a:latin typeface="IBM Plex Sans"/>
+              </a:rPr>
+              <a:t>Încerc</a:t>
+            </a:r>
+            <a:r>
+              <a:rPr sz="1150" b="0" dirty="0">
+                <a:solidFill>
+                  <a:srgbClr val="4A5568"/>
+                </a:solidFill>
+                <a:latin typeface="IBM Plex Sans"/>
+              </a:rPr>
+              <a:t>: </a:t>
+            </a:r>
+            <a:r>
+              <a:rPr sz="1150" b="0" dirty="0" err="1">
+                <a:solidFill>
+                  <a:srgbClr val="4A5568"/>
+                </a:solidFill>
+                <a:latin typeface="IBM Plex Sans"/>
+              </a:rPr>
+              <a:t>etichetez</a:t>
+            </a:r>
+            <a:r>
+              <a:rPr sz="1150" b="0" dirty="0">
+                <a:solidFill>
+                  <a:srgbClr val="4A5568"/>
+                </a:solidFill>
+                <a:latin typeface="IBM Plex Sans"/>
+              </a:rPr>
+              <a:t> 30–50 </a:t>
+            </a:r>
+            <a:r>
+              <a:rPr sz="1150" b="0" dirty="0" err="1">
+                <a:solidFill>
+                  <a:srgbClr val="4A5568"/>
+                </a:solidFill>
+                <a:latin typeface="IBM Plex Sans"/>
+              </a:rPr>
+              <a:t>parcele</a:t>
+            </a:r>
+            <a:r>
+              <a:rPr sz="1150" b="0" dirty="0">
+                <a:solidFill>
+                  <a:srgbClr val="4A5568"/>
+                </a:solidFill>
+                <a:latin typeface="IBM Plex Sans"/>
+              </a:rPr>
+              <a:t> cu </a:t>
+            </a:r>
+            <a:r>
+              <a:rPr sz="1150" b="0" dirty="0" err="1">
+                <a:solidFill>
+                  <a:srgbClr val="4A5568"/>
+                </a:solidFill>
+                <a:latin typeface="IBM Plex Sans"/>
+              </a:rPr>
+              <a:t>cultură</a:t>
+            </a:r>
+            <a:r>
+              <a:rPr sz="1150" b="0" dirty="0">
+                <a:solidFill>
+                  <a:srgbClr val="4A5568"/>
+                </a:solidFill>
+                <a:latin typeface="IBM Plex Sans"/>
+              </a:rPr>
+              <a:t> </a:t>
+            </a:r>
+            <a:r>
+              <a:rPr sz="1150" b="0" dirty="0" err="1">
+                <a:solidFill>
+                  <a:srgbClr val="4A5568"/>
+                </a:solidFill>
+                <a:latin typeface="IBM Plex Sans"/>
+              </a:rPr>
+              <a:t>clară</a:t>
+            </a:r>
+            <a:r>
+              <a:rPr sz="1150" b="0" dirty="0">
+                <a:solidFill>
+                  <a:srgbClr val="4A5568"/>
+                </a:solidFill>
+                <a:latin typeface="IBM Plex Sans"/>
+              </a:rPr>
+              <a:t>, </a:t>
+            </a:r>
+            <a:r>
+              <a:rPr sz="1150" b="0" dirty="0" err="1">
+                <a:solidFill>
+                  <a:srgbClr val="4A5568"/>
+                </a:solidFill>
+                <a:latin typeface="IBM Plex Sans"/>
+              </a:rPr>
+              <a:t>după</a:t>
+            </a:r>
+            <a:r>
+              <a:rPr sz="1150" b="0" dirty="0">
+                <a:solidFill>
+                  <a:srgbClr val="4A5568"/>
+                </a:solidFill>
+                <a:latin typeface="IBM Plex Sans"/>
+              </a:rPr>
+              <a:t> un protocol </a:t>
+            </a:r>
+            <a:r>
+              <a:rPr sz="1150" b="0" dirty="0" err="1">
+                <a:solidFill>
+                  <a:srgbClr val="4A5568"/>
+                </a:solidFill>
+                <a:latin typeface="IBM Plex Sans"/>
+              </a:rPr>
+              <a:t>scris</a:t>
+            </a:r>
+            <a:r>
+              <a:rPr sz="1150" b="0" dirty="0">
+                <a:solidFill>
+                  <a:srgbClr val="4A5568"/>
+                </a:solidFill>
+                <a:latin typeface="IBM Plex Sans"/>
+              </a:rPr>
+              <a:t>.</a:t>
+            </a:r>
+            <a:endParaRPr sz="1150" b="0" dirty="0">
+              <a:solidFill>
+                <a:srgbClr val="C8702A"/>
+              </a:solidFill>
+              <a:latin typeface="IBM Plex Sans"/>
+            </a:endParaRPr>
           </a:p>
           <a:p>
             <a:pPr>
@@ -4177,22 +4609,148 @@
               </a:spcAft>
             </a:pPr>
             <a:r>
-              <a:rPr sz="1250" b="1">
+              <a:rPr sz="1250" b="1" dirty="0">
                 <a:solidFill>
                   <a:srgbClr val="1B2A41"/>
                 </a:solidFill>
                 <a:latin typeface="IBM Plex Sans"/>
               </a:rPr>
-              <a:t>2. Clasele și sezonul diferă: </a:t>
-            </a:r>
-            <a:r>
-              <a:rPr sz="1250" b="0">
+              <a:t>2. </a:t>
+            </a:r>
+            <a:r>
+              <a:rPr sz="1250" b="1" dirty="0" err="1">
+                <a:solidFill>
+                  <a:srgbClr val="1B2A41"/>
+                </a:solidFill>
+                <a:latin typeface="IBM Plex Sans"/>
+              </a:rPr>
+              <a:t>Clasele</a:t>
+            </a:r>
+            <a:r>
+              <a:rPr sz="1250" b="1" dirty="0">
+                <a:solidFill>
+                  <a:srgbClr val="1B2A41"/>
+                </a:solidFill>
+                <a:latin typeface="IBM Plex Sans"/>
+              </a:rPr>
+              <a:t> </a:t>
+            </a:r>
+            <a:r>
+              <a:rPr sz="1250" b="1" dirty="0" err="1">
+                <a:solidFill>
+                  <a:srgbClr val="1B2A41"/>
+                </a:solidFill>
+                <a:latin typeface="IBM Plex Sans"/>
+              </a:rPr>
+              <a:t>și</a:t>
+            </a:r>
+            <a:r>
+              <a:rPr sz="1250" b="1" dirty="0">
+                <a:solidFill>
+                  <a:srgbClr val="1B2A41"/>
+                </a:solidFill>
+                <a:latin typeface="IBM Plex Sans"/>
+              </a:rPr>
+              <a:t> </a:t>
+            </a:r>
+            <a:r>
+              <a:rPr sz="1250" b="1" dirty="0" err="1">
+                <a:solidFill>
+                  <a:srgbClr val="1B2A41"/>
+                </a:solidFill>
+                <a:latin typeface="IBM Plex Sans"/>
+              </a:rPr>
+              <a:t>sezonul</a:t>
+            </a:r>
+            <a:r>
+              <a:rPr sz="1250" b="1" dirty="0">
+                <a:solidFill>
+                  <a:srgbClr val="1B2A41"/>
+                </a:solidFill>
+                <a:latin typeface="IBM Plex Sans"/>
+              </a:rPr>
+              <a:t> </a:t>
+            </a:r>
+            <a:r>
+              <a:rPr sz="1250" b="1" dirty="0" err="1">
+                <a:solidFill>
+                  <a:srgbClr val="1B2A41"/>
+                </a:solidFill>
+                <a:latin typeface="IBM Plex Sans"/>
+              </a:rPr>
+              <a:t>diferă</a:t>
+            </a:r>
+            <a:r>
+              <a:rPr sz="1250" b="1" dirty="0">
+                <a:solidFill>
+                  <a:srgbClr val="1B2A41"/>
+                </a:solidFill>
+                <a:latin typeface="IBM Plex Sans"/>
+              </a:rPr>
+              <a:t>: </a:t>
+            </a:r>
+            <a:r>
+              <a:rPr sz="1250" b="0" dirty="0">
                 <a:solidFill>
                   <a:srgbClr val="4A5568"/>
                 </a:solidFill>
                 <a:latin typeface="IBM Plex Sans"/>
               </a:rPr>
-              <a:t>18 culturi FR → 10 clase comune; FR 2018–19 vs. RO 2024.</a:t>
+              <a:t>18 </a:t>
+            </a:r>
+            <a:r>
+              <a:rPr sz="1250" b="0" dirty="0" err="1">
+                <a:solidFill>
+                  <a:srgbClr val="4A5568"/>
+                </a:solidFill>
+                <a:latin typeface="IBM Plex Sans"/>
+              </a:rPr>
+              <a:t>culturi</a:t>
+            </a:r>
+            <a:r>
+              <a:rPr sz="1250" b="0" dirty="0">
+                <a:solidFill>
+                  <a:srgbClr val="4A5568"/>
+                </a:solidFill>
+                <a:latin typeface="IBM Plex Sans"/>
+              </a:rPr>
+              <a:t> FR → 10 </a:t>
+            </a:r>
+            <a:r>
+              <a:rPr sz="1250" b="0" dirty="0" err="1">
+                <a:solidFill>
+                  <a:srgbClr val="4A5568"/>
+                </a:solidFill>
+                <a:latin typeface="IBM Plex Sans"/>
+              </a:rPr>
+              <a:t>clase</a:t>
+            </a:r>
+            <a:r>
+              <a:rPr sz="1250" b="0" dirty="0">
+                <a:solidFill>
+                  <a:srgbClr val="4A5568"/>
+                </a:solidFill>
+                <a:latin typeface="IBM Plex Sans"/>
+              </a:rPr>
+              <a:t> </a:t>
+            </a:r>
+            <a:r>
+              <a:rPr sz="1250" b="0" dirty="0" err="1">
+                <a:solidFill>
+                  <a:srgbClr val="4A5568"/>
+                </a:solidFill>
+                <a:latin typeface="IBM Plex Sans"/>
+              </a:rPr>
+              <a:t>comune</a:t>
+            </a:r>
+            <a:r>
+              <a:rPr sz="1250" b="0" dirty="0">
+                <a:solidFill>
+                  <a:srgbClr val="4A5568"/>
+                </a:solidFill>
+                <a:latin typeface="IBM Plex Sans"/>
+              </a:rPr>
+              <a:t>; FR 2018–19 vs. RO 2024.</a:t>
             </a:r>
           </a:p>
           <a:p>
@@ -4202,29 +4760,139 @@
               </a:spcAft>
             </a:pPr>
             <a:r>
-              <a:rPr sz="1150" b="0">
+              <a:rPr sz="1150" b="0" dirty="0">
                 <a:solidFill>
                   <a:srgbClr val="4A5568"/>
                 </a:solidFill>
                 <a:latin typeface="IBM Plex Sans"/>
               </a:rPr>
-              <a:t>→ Încerc: aliniere pe ziua din sezon (1 sep.), ca în figura de pe slide 1.</a:t>
-            </a:r>
-          </a:p>
-          <a:p>
-            <a:pPr>
-              <a:spcAft>
-                <a:spcPts val="0"/>
-              </a:spcAft>
-            </a:pPr>
-            <a:r>
-              <a:rPr sz="1150" b="0">
-                <a:solidFill>
-                  <a:srgbClr val="C8702A"/>
-                </a:solidFill>
-                <a:latin typeface="IBM Plex Sans"/>
-              </a:rPr>
-              <a:t>→ Risc: PASTIS nu are mască de nori (~15% pixeli acoperiți).</a:t>
+              <a:t>→ </a:t>
+            </a:r>
+            <a:r>
+              <a:rPr sz="1150" b="0" dirty="0" err="1">
+                <a:solidFill>
+                  <a:srgbClr val="4A5568"/>
+                </a:solidFill>
+                <a:latin typeface="IBM Plex Sans"/>
+              </a:rPr>
+              <a:t>Încerc</a:t>
+            </a:r>
+            <a:r>
+              <a:rPr sz="1150" b="0" dirty="0">
+                <a:solidFill>
+                  <a:srgbClr val="4A5568"/>
+                </a:solidFill>
+                <a:latin typeface="IBM Plex Sans"/>
+              </a:rPr>
+              <a:t>: </a:t>
+            </a:r>
+            <a:r>
+              <a:rPr sz="1150" b="0" dirty="0" err="1">
+                <a:solidFill>
+                  <a:srgbClr val="4A5568"/>
+                </a:solidFill>
+                <a:latin typeface="IBM Plex Sans"/>
+              </a:rPr>
+              <a:t>aliniere</a:t>
+            </a:r>
+            <a:r>
+              <a:rPr sz="1150" b="0" dirty="0">
+                <a:solidFill>
+                  <a:srgbClr val="4A5568"/>
+                </a:solidFill>
+                <a:latin typeface="IBM Plex Sans"/>
+              </a:rPr>
+              <a:t> pe </a:t>
+            </a:r>
+            <a:r>
+              <a:rPr sz="1150" b="0" dirty="0" err="1">
+                <a:solidFill>
+                  <a:srgbClr val="4A5568"/>
+                </a:solidFill>
+                <a:latin typeface="IBM Plex Sans"/>
+              </a:rPr>
+              <a:t>ziua</a:t>
+            </a:r>
+            <a:r>
+              <a:rPr sz="1150" b="0" dirty="0">
+                <a:solidFill>
+                  <a:srgbClr val="4A5568"/>
+                </a:solidFill>
+                <a:latin typeface="IBM Plex Sans"/>
+              </a:rPr>
+              <a:t> din </a:t>
+            </a:r>
+            <a:r>
+              <a:rPr sz="1150" b="0" dirty="0" err="1">
+                <a:solidFill>
+                  <a:srgbClr val="4A5568"/>
+                </a:solidFill>
+                <a:latin typeface="IBM Plex Sans"/>
+              </a:rPr>
+              <a:t>sezon</a:t>
+            </a:r>
+            <a:r>
+              <a:rPr sz="1150" b="0" dirty="0">
+                <a:solidFill>
+                  <a:srgbClr val="4A5568"/>
+                </a:solidFill>
+                <a:latin typeface="IBM Plex Sans"/>
+              </a:rPr>
+              <a:t> (1 </a:t>
+            </a:r>
+            <a:r>
+              <a:rPr sz="1150" b="0" dirty="0" err="1">
+                <a:solidFill>
+                  <a:srgbClr val="4A5568"/>
+                </a:solidFill>
+                <a:latin typeface="IBM Plex Sans"/>
+              </a:rPr>
+              <a:t>sep.</a:t>
+            </a:r>
+            <a:r>
+              <a:rPr sz="1150" b="0" dirty="0">
+                <a:solidFill>
+                  <a:srgbClr val="4A5568"/>
+                </a:solidFill>
+                <a:latin typeface="IBM Plex Sans"/>
+              </a:rPr>
+              <a:t>), ca </a:t>
+            </a:r>
+            <a:r>
+              <a:rPr sz="1150" b="0" dirty="0" err="1">
+                <a:solidFill>
+                  <a:srgbClr val="4A5568"/>
+                </a:solidFill>
+                <a:latin typeface="IBM Plex Sans"/>
+              </a:rPr>
+              <a:t>în</a:t>
+            </a:r>
+            <a:r>
+              <a:rPr sz="1150" b="0" dirty="0">
+                <a:solidFill>
+                  <a:srgbClr val="4A5568"/>
+                </a:solidFill>
+                <a:latin typeface="IBM Plex Sans"/>
+              </a:rPr>
+              <a:t> </a:t>
+            </a:r>
+            <a:r>
+              <a:rPr sz="1150" b="0" dirty="0" err="1">
+                <a:solidFill>
+                  <a:srgbClr val="4A5568"/>
+                </a:solidFill>
+                <a:latin typeface="IBM Plex Sans"/>
+              </a:rPr>
+              <a:t>figura</a:t>
+            </a:r>
+            <a:r>
+              <a:rPr sz="1150" b="0" dirty="0">
+                <a:solidFill>
+                  <a:srgbClr val="4A5568"/>
+                </a:solidFill>
+                <a:latin typeface="IBM Plex Sans"/>
+              </a:rPr>
+              <a:t> de pe slide 1.</a:t>
             </a:r>
           </a:p>
         </p:txBody>
@@ -4272,6 +4940,7 @@
           <a:lstStyle/>
           <a:p>
             <a:pPr algn="ctr"/>
+            <a:endParaRPr/>
           </a:p>
         </p:txBody>
       </p:sp>
@@ -4292,7 +4961,7 @@
           <a:noFill/>
         </p:spPr>
         <p:txBody>
-          <a:bodyPr wrap="square" lIns="0" rIns="0" tIns="0" bIns="0" anchor="t">
+          <a:bodyPr wrap="square" lIns="0" tIns="0" rIns="0" bIns="0" anchor="t">
             <a:spAutoFit/>
           </a:bodyPr>
           <a:lstStyle/>
@@ -4431,7 +5100,7 @@
           <a:noFill/>
         </p:spPr>
         <p:txBody>
-          <a:bodyPr wrap="square" lIns="0" rIns="0" tIns="0" bIns="0" anchor="t">
+          <a:bodyPr wrap="square" lIns="0" tIns="0" rIns="0" bIns="0" anchor="t">
             <a:spAutoFit/>
           </a:bodyPr>
           <a:lstStyle/>
